--- a/vault/courses/picking-a-frontier-model-2026-q2/ch03-slides.pptx
+++ b/vault/courses/picking-a-frontier-model-2026-q2/ch03-slides.pptx
@@ -3614,7 +3614,7 @@
                   <a:srgbClr val="A1A1AA"/>
                 </a:solidFill>
               </a:rPr>
-              <a:t>Picking a Frontier Model — Q2 2026  ·  Koenig AI Academy</a:t>
+              <a:t>academy.kspl.tech | Koenig AI Academy</a:t>
             </a:r>
           </a:p>
         </p:txBody>
@@ -4119,7 +4119,7 @@
                   <a:srgbClr val="A1A1AA"/>
                 </a:solidFill>
               </a:rPr>
-              <a:t>Picking a Frontier Model — Q2 2026  ·  Koenig AI Academy</a:t>
+              <a:t>academy.kspl.tech | Koenig AI Academy</a:t>
             </a:r>
           </a:p>
         </p:txBody>
@@ -4494,7 +4494,7 @@
                   <a:srgbClr val="A1A1AA"/>
                 </a:solidFill>
               </a:rPr>
-              <a:t>Picking a Frontier Model — Q2 2026  ·  Koenig AI Academy</a:t>
+              <a:t>academy.kspl.tech | Koenig AI Academy</a:t>
             </a:r>
           </a:p>
         </p:txBody>
@@ -5456,7 +5456,7 @@
                   <a:srgbClr val="A1A1AA"/>
                 </a:solidFill>
               </a:rPr>
-              <a:t>Picking a Frontier Model — Q2 2026  ·  Koenig AI Academy</a:t>
+              <a:t>academy.kspl.tech | Koenig AI Academy</a:t>
             </a:r>
           </a:p>
         </p:txBody>
@@ -5834,7 +5834,7 @@
                   <a:srgbClr val="A1A1AA"/>
                 </a:solidFill>
               </a:rPr>
-              <a:t>Picking a Frontier Model — Q2 2026  ·  Koenig AI Academy</a:t>
+              <a:t>academy.kspl.tech | Koenig AI Academy</a:t>
             </a:r>
           </a:p>
         </p:txBody>
@@ -6413,7 +6413,7 @@
                   <a:srgbClr val="A1A1AA"/>
                 </a:solidFill>
               </a:rPr>
-              <a:t>Picking a Frontier Model — Q2 2026  ·  Koenig AI Academy</a:t>
+              <a:t>academy.kspl.tech | Koenig AI Academy</a:t>
             </a:r>
           </a:p>
         </p:txBody>
@@ -7230,7 +7230,7 @@
                   <a:srgbClr val="A1A1AA"/>
                 </a:solidFill>
               </a:rPr>
-              <a:t>Picking a Frontier Model — Q2 2026  ·  Koenig AI Academy</a:t>
+              <a:t>academy.kspl.tech | Koenig AI Academy</a:t>
             </a:r>
           </a:p>
         </p:txBody>
@@ -8217,7 +8217,7 @@
                   <a:srgbClr val="A1A1AA"/>
                 </a:solidFill>
               </a:rPr>
-              <a:t>Picking a Frontier Model — Q2 2026  ·  Koenig AI Academy</a:t>
+              <a:t>academy.kspl.tech | Koenig AI Academy</a:t>
             </a:r>
           </a:p>
         </p:txBody>
@@ -8762,7 +8762,7 @@
                   <a:srgbClr val="A1A1AA"/>
                 </a:solidFill>
               </a:rPr>
-              <a:t>Picking a Frontier Model — Q2 2026  ·  Koenig AI Academy</a:t>
+              <a:t>academy.kspl.tech | Koenig AI Academy</a:t>
             </a:r>
           </a:p>
         </p:txBody>
